--- a/anglais_grammaire/powerpoints/English_Present_perfect.pptx
+++ b/anglais_grammaire/powerpoints/English_Present_perfect.pptx
@@ -144,12 +144,12 @@
   <p:extLst>
     <p:ext uri="{521415D9-36F7-43E2-AB2F-B90AF26B5E84}">
       <p14:sectionLst xmlns:p14="http://schemas.microsoft.com/office/powerpoint/2010/main">
-        <p14:section name="Opening" id="{d1dabeba-988a-5a8c-09f7-10b6b4d14231}">
+        <p14:section name="Opening" id="{821dd644-15f7-efbe-9894-2bbd995ac76f}">
           <p14:sldIdLst>
             <p14:sldId id="256"/>
           </p14:sldIdLst>
         </p14:section>
-        <p14:section name="Discover" id="{c3032523-4c3f-1beb-a5ba-e45882664210}">
+        <p14:section name="Discover" id="{13dc768d-f779-1ab4-be83-d913630d4326}">
           <p14:sldIdLst>
             <p14:sldId id="257"/>
             <p14:sldId id="258"/>
@@ -160,7 +160,7 @@
             <p14:sldId id="263"/>
           </p14:sldIdLst>
         </p14:section>
-        <p14:section name="Three uses" id="{542eddba-ff9f-b6c0-b37b-cc0ec3ec786b}">
+        <p14:section name="Three uses" id="{a9c2fd7d-603e-7a94-0916-0b1a25f82330}">
           <p14:sldIdLst>
             <p14:sldId id="264"/>
             <p14:sldId id="265"/>
@@ -169,7 +169,7 @@
             <p14:sldId id="268"/>
           </p14:sldIdLst>
         </p14:section>
-        <p14:section name="Past simple or present perfect?" id="{431ae804-c2cf-4e1e-b343-11e24eca672a}">
+        <p14:section name="Past simple or present perfect?" id="{9d1885d4-3635-d949-d0b1-bdb0a3fa8ebf}">
           <p14:sldIdLst>
             <p14:sldId id="269"/>
             <p14:sldId id="270"/>
@@ -178,7 +178,7 @@
             <p14:sldId id="273"/>
           </p14:sldIdLst>
         </p14:section>
-        <p14:section name="YOUR TURN! — Exercises" id="{3cbc3c75-4363-70e9-1b63-9ce19e492140}">
+        <p14:section name="YOUR TURN! — Exercises" id="{4362d0e1-c14a-e7e2-f95c-37d4d857cdc5}">
           <p14:sldIdLst>
             <p14:sldId id="274"/>
             <p14:sldId id="275"/>
@@ -201,7 +201,7 @@
             <p14:sldId id="292"/>
           </p14:sldIdLst>
         </p14:section>
-        <p14:section name="Closing" id="{85a29578-84e5-f6f3-e224-8c0d3bf733ca}">
+        <p14:section name="Closing" id="{3ca2e7bb-c702-0afe-3ead-65e1ba98007d}">
           <p14:sldIdLst>
             <p14:sldId id="293"/>
           </p14:sldIdLst>
@@ -56201,8 +56201,8 @@
         </p:nvSpPr>
         <p:spPr>
           <a:xfrm>
-            <a:off x="2934302" y="1554480"/>
-            <a:ext cx="976023" cy="658368"/>
+            <a:off x="2879438" y="1554480"/>
+            <a:ext cx="866295" cy="658368"/>
           </a:xfrm>
           <a:prstGeom prst="roundRect">
             <a:avLst>
@@ -56230,8 +56230,8 @@
         </p:nvSpPr>
         <p:spPr>
           <a:xfrm>
-            <a:off x="2934302" y="1554480"/>
-            <a:ext cx="976023" cy="658368"/>
+            <a:off x="2879438" y="1554480"/>
+            <a:ext cx="866295" cy="658368"/>
           </a:xfrm>
           <a:prstGeom prst="rect">
             <a:avLst/>
@@ -56266,8 +56266,8 @@
         </p:nvSpPr>
         <p:spPr>
           <a:xfrm>
-            <a:off x="2614262" y="2249424"/>
-            <a:ext cx="1616103" cy="274320"/>
+            <a:off x="2559398" y="2249424"/>
+            <a:ext cx="1506375" cy="274320"/>
           </a:xfrm>
           <a:prstGeom prst="rect">
             <a:avLst/>
@@ -56302,7 +56302,7 @@
         </p:nvSpPr>
         <p:spPr>
           <a:xfrm>
-            <a:off x="3983478" y="1554480"/>
+            <a:off x="3818886" y="1554480"/>
             <a:ext cx="1934607" cy="658368"/>
           </a:xfrm>
           <a:prstGeom prst="roundRect">
@@ -56331,7 +56331,7 @@
         </p:nvSpPr>
         <p:spPr>
           <a:xfrm>
-            <a:off x="3983478" y="1554480"/>
+            <a:off x="3818886" y="1554480"/>
             <a:ext cx="1934607" cy="658368"/>
           </a:xfrm>
           <a:prstGeom prst="rect">
@@ -56367,7 +56367,7 @@
         </p:nvSpPr>
         <p:spPr>
           <a:xfrm>
-            <a:off x="3663438" y="2249424"/>
+            <a:off x="3498846" y="2249424"/>
             <a:ext cx="2574687" cy="274320"/>
           </a:xfrm>
           <a:prstGeom prst="rect">
@@ -56403,7 +56403,7 @@
         </p:nvSpPr>
         <p:spPr>
           <a:xfrm>
-            <a:off x="5991237" y="1554480"/>
+            <a:off x="5826645" y="1554480"/>
             <a:ext cx="2175540" cy="658368"/>
           </a:xfrm>
           <a:prstGeom prst="roundRect">
@@ -56430,7 +56430,7 @@
         </p:nvSpPr>
         <p:spPr>
           <a:xfrm>
-            <a:off x="5991237" y="1554480"/>
+            <a:off x="5826645" y="1554480"/>
             <a:ext cx="2175540" cy="658368"/>
           </a:xfrm>
           <a:prstGeom prst="rect">
